--- a/outputs/deck/AssetLens_Board_Pack.pptx
+++ b/outputs/deck/AssetLens_Board_Pack.pptx
@@ -3262,7 +3262,7 @@
               </a:defRPr>
             </a:pPr>
             <a:r>
-              <a:t>• GCC private wealth office: illustrative NPV $184m, but 93% comes from terminal value (explicit-period NPV $14m): a staged entry is advisable.</a:t>
+              <a:t>• GCC private wealth office: illustrative NPV $184m, but 93% comes from terminal value (explicit-period NPV $14m): Monte Carlo: mean NPV $275m, 9% chance of loss; staging a pilot first was worth $-94m (negative: it delays a project that is positive in most paths).</a:t>
             </a:r>
           </a:p>
         </p:txBody>
@@ -4063,7 +4063,37 @@
               </a:defRPr>
             </a:pPr>
             <a:r>
-              <a:t>• Recommendation: conditional go, staged entry (representative office first), gated on advisor AUM ramp at year 2.</a:t>
+              <a:t>• Monte Carlo (1,000 paths): mean NPV $275m (P10 $6m, P90 $619m), 9% chance of loss.</a:t>
+            </a:r>
+          </a:p>
+          <a:p>
+            <a:pPr>
+              <a:spcAft>
+                <a:spcPts val="500"/>
+              </a:spcAft>
+              <a:defRPr sz="1300" b="0">
+                <a:solidFill>
+                  <a:srgbClr val="0B0B0B"/>
+                </a:solidFill>
+              </a:defRPr>
+            </a:pPr>
+            <a:r>
+              <a:t>• Staged entry (pilot, expand if AUM clears $350m at year 2; 52% pass): option value $-94m, i.e. staging lowers expected value; use it only as risk control.</a:t>
+            </a:r>
+          </a:p>
+          <a:p>
+            <a:pPr>
+              <a:spcAft>
+                <a:spcPts val="500"/>
+              </a:spcAft>
+              <a:defRPr sz="1300" b="0">
+                <a:solidFill>
+                  <a:srgbClr val="0B0B0B"/>
+                </a:solidFill>
+              </a:defRPr>
+            </a:pPr>
+            <a:r>
+              <a:t>• Recommendation: conditional go on the full plan, gated on validating AUM per advisor and net revenue bps; the explicit-period NPV is small so the case rests on terminal value.</a:t>
             </a:r>
           </a:p>
           <a:p>

--- a/outputs/deck/AssetLens_Board_Pack.pptx
+++ b/outputs/deck/AssetLens_Board_Pack.pptx
@@ -4108,7 +4108,7 @@
               </a:defRPr>
             </a:pPr>
             <a:r>
-              <a:t>• Savings programme (synthetic): 40 initiatives, $328m target, $104m realised to date.</a:t>
+              <a:t>• Savings programme (synthetic): 40 initiatives, $382m target, $119m realised to date.</a:t>
             </a:r>
           </a:p>
         </p:txBody>

--- a/outputs/deck/AssetLens_Board_Pack.pptx
+++ b/outputs/deck/AssetLens_Board_Pack.pptx
@@ -3217,7 +3217,7 @@
               </a:defRPr>
             </a:pPr>
             <a:r>
-              <a:t>• Fee yield is the pressure point: T4Q yields are 34.8 bps (GS), 15.6 (BLK), 23.9 (IVZ), 38.6 (TROW); fitted trends are -0.33, -0.35, -2.89 and -1.23 bps a year.</a:t>
+              <a:t>• Fee yield is the pressure point: T4Q yields are 34.8 bps (GS), 15.6 (BLK), 23.9 (IVZ), 38.6 (TROW); fitted trends are -0.33, -0.35, -2.89 and -1.27 bps a year.</a:t>
             </a:r>
           </a:p>
           <a:p>

--- a/outputs/deck/AssetLens_Board_Pack.pptx
+++ b/outputs/deck/AssetLens_Board_Pack.pptx
@@ -3126,7 +3126,7 @@
               </a:defRPr>
             </a:pPr>
             <a:r>
-              <a:t>Executive summary: GS AWM leads on flow growth, margin depends on the market and on the allocation lens</a:t>
+              <a:t>Executive summary: GS AWM leads on flow growth; margin hinges on markets and allocation</a:t>
             </a:r>
           </a:p>
         </p:txBody>
@@ -3262,7 +3262,7 @@
               </a:defRPr>
             </a:pPr>
             <a:r>
-              <a:t>• GCC private wealth office: illustrative NPV $184m, but 93% comes from terminal value (explicit-period NPV $14m): Monte Carlo: mean NPV $275m, 9% chance of loss; staging a pilot first was worth $-94m (negative: it delays a project that is positive in most paths).</a:t>
+              <a:t>• GCC private wealth office: illustrative NPV $184m, but 93% comes from terminal value (explicit-period NPV $14m): Monte Carlo: mean NPV $275m, 9% chance of loss; staging a pilot first was worth -$94m (negative: it delays a project that is positive in most paths).</a:t>
             </a:r>
           </a:p>
         </p:txBody>
@@ -3442,7 +3442,7 @@
               </a:defRPr>
             </a:pPr>
             <a:r>
-              <a:t>• Operating margin T4Q: GS 25.3% (as of 2026-06-30; segment pre-tax), BLK 32.5%, IVZ 15.4%, TROW 30.8%.</a:t>
+              <a:t>• Operating margin T4Q: GS 25.3% (as of 2026-06-30; segment pre-tax), BLK 32.5%, IVZ 15.4%, TROW 30.8%, JPM AWM 36.8%, MS IM 23.1%, BEN 10.9%.</a:t>
             </a:r>
           </a:p>
           <a:p>
@@ -4078,7 +4078,7 @@
               </a:defRPr>
             </a:pPr>
             <a:r>
-              <a:t>• Staged entry (pilot, expand if AUM clears $350m at year 2; 52% pass): option value $-94m, i.e. staging lowers expected value; use it only as risk control.</a:t>
+              <a:t>• Staged entry (pilot, expand if AUM clears $350m at year 2; 52% pass): option value -$94m, i.e. staging lowers expected value; use it only as risk control.</a:t>
             </a:r>
           </a:p>
           <a:p>

--- a/outputs/deck/AssetLens_Board_Pack.pptx
+++ b/outputs/deck/AssetLens_Board_Pack.pptx
@@ -3262,7 +3262,7 @@
               </a:defRPr>
             </a:pPr>
             <a:r>
-              <a:t>• GCC private wealth office: illustrative NPV $184m, but 93% comes from terminal value (explicit-period NPV $14m): Monte Carlo: mean NPV $275m, 9% chance of loss; staging a pilot first was worth -$94m (negative: it delays a project that is positive in most paths).</a:t>
+              <a:t>• GCC private wealth office: illustrative NPV $170m, but 93% comes from terminal value (explicit-period NPV $11m): Monte Carlo: mean NPV $255m, 10% chance of loss; staging a pilot first was worth -$87m (negative: it delays a project that is positive in most paths).</a:t>
             </a:r>
           </a:p>
         </p:txBody>
@@ -3667,7 +3667,7 @@
               </a:defRPr>
             </a:pPr>
             <a:r>
-              <a:t>• Key risks: incentive-fee and Investments volatility, liquidity-product flows reversing, fee compression, lending credit costs. H1-2026 pre-tax earnings ran -16% versus an unverified top-down budget.</a:t>
+              <a:t>• Key risks: incentive-fee and Investments volatility, liquidity-product flows reversing, fee compression, lending credit costs. H1-2026 pre-tax earnings ran -16% versus a top-down budget (30% margin target per GS 10-Q; 8% revenue growth is an AssetLens assumption).</a:t>
             </a:r>
           </a:p>
         </p:txBody>
@@ -3971,7 +3971,7 @@
               </a:defRPr>
             </a:pPr>
             <a:r>
-              <a:t>Sources: AssetLens GCC business case (config/assumptions.yaml, illustrative; tax rates to be verified); synthetic savings tracker  |  Synthetic business-unit data where marked.</a:t>
+              <a:t>Sources: AssetLens GCC business case (config/assumptions.yaml, illustrative; tax: UAE 15% minimum top-up tax, KSA 20%); synthetic savings tracker  |  Synthetic business-unit data where marked.</a:t>
             </a:r>
           </a:p>
         </p:txBody>
@@ -4033,7 +4033,7 @@
               </a:defRPr>
             </a:pPr>
             <a:r>
-              <a:t>• Base case (DIFC): NPV $184m, IRR 51%, payback 5.6 years, peak funding $35m.</a:t>
+              <a:t>• Base case (DIFC): NPV $170m, IRR 50%, payback 5.7 years, peak funding $35m.</a:t>
             </a:r>
           </a:p>
           <a:p>
@@ -4048,7 +4048,7 @@
               </a:defRPr>
             </a:pPr>
             <a:r>
-              <a:t>• Terminal value is 93% of NPV; the explicit seven-year NPV is $14m.</a:t>
+              <a:t>• Terminal value is 93% of NPV; the explicit seven-year NPV is $11m.</a:t>
             </a:r>
           </a:p>
           <a:p>
@@ -4063,7 +4063,7 @@
               </a:defRPr>
             </a:pPr>
             <a:r>
-              <a:t>• Monte Carlo (1,000 paths): mean NPV $275m (P10 $6m, P90 $619m), 9% chance of loss.</a:t>
+              <a:t>• Monte Carlo (1,000 paths): mean NPV $255m (P10 $3m, P90 $577m), 10% chance of loss.</a:t>
             </a:r>
           </a:p>
           <a:p>
@@ -4078,7 +4078,7 @@
               </a:defRPr>
             </a:pPr>
             <a:r>
-              <a:t>• Staged entry (pilot, expand if AUM clears $350m at year 2; 52% pass): option value -$94m, i.e. staging lowers expected value; use it only as risk control.</a:t>
+              <a:t>• Staged entry (pilot, expand if AUM clears $350m at year 2; 52% pass): option value -$87m, i.e. staging lowers expected value; use it only as risk control.</a:t>
             </a:r>
           </a:p>
           <a:p>
@@ -4300,7 +4300,7 @@
               </a:defRPr>
             </a:pPr>
             <a:r>
-              <a:t>• Forecast: driver-based (flows, market returns, fee compression, comp ratio with floor); scenario inputs are assumptions. Budget targets from press reports are unverified.</a:t>
+              <a:t>• Forecast: driver-based (flows, market returns, fee compression, comp ratio with floor); scenario inputs are assumptions. Budget: 30% margin target is from GS's 10-Q; 8% revenue growth is an assumption.</a:t>
             </a:r>
           </a:p>
           <a:p>
